--- a/dist/초1/사회·역사/가족과생활/초1_사회·역사_가족과생활_01_가족의생활_학생용.pptx
+++ b/dist/초1/사회·역사/가족과생활/초1_사회·역사_가족과생활_01_가족의생활_학생용.pptx
@@ -120,13 +120,13 @@
   <p:extLst>
     <p:ext uri="{521415D9-36F7-43E2-AB2F-B90AF26B5E84}">
       <p14:sectionLst xmlns:p14="http://schemas.microsoft.com/office/powerpoint/2010/main">
-        <p14:section name="도입" id="{d5b7847d-0897-e0fc-a412-c20baa0b42c4}">
+        <p14:section name="도입" id="{36fc65de-ec37-283b-3a86-a5b57f25237a}">
           <p14:sldIdLst>
             <p14:sldId id="256"/>
             <p14:sldId id="257"/>
           </p14:sldIdLst>
         </p14:section>
-        <p14:section name="개념" id="{483f1854-94b1-0867-47b7-5bfcf3705394}">
+        <p14:section name="개념" id="{939cf4b0-8a5d-e33f-bbe1-67b5efb1f5b4}">
           <p14:sldIdLst>
             <p14:sldId id="258"/>
             <p14:sldId id="259"/>
@@ -134,32 +134,32 @@
             <p14:sldId id="262"/>
           </p14:sldIdLst>
         </p14:section>
-        <p14:section name="연습" id="{24c47ef9-6524-4c76-e834-963236e3d2c6}">
+        <p14:section name="연습" id="{29c7d784-bf79-3a6c-0434-b09a189df051}">
           <p14:sldIdLst>
             <p14:sldId id="260"/>
             <p14:sldId id="263"/>
             <p14:sldId id="264"/>
           </p14:sldIdLst>
         </p14:section>
-        <p14:section name="개념" id="{b46fcfb6-a4c9-b917-ce17-8b9db790ea57}">
+        <p14:section name="개념" id="{ae2ef911-9813-2aa1-222a-714e4a4cf59a}">
           <p14:sldIdLst/>
         </p14:section>
-        <p14:section name="연습" id="{194efc41-21ea-b437-e96d-561171b0ae38}">
+        <p14:section name="연습" id="{f7e153da-245c-ce1d-d8f0-0a73fd674808}">
           <p14:sldIdLst/>
         </p14:section>
-        <p14:section name="확인" id="{41517621-2777-8bde-91e6-8781b3cf6f45}">
+        <p14:section name="확인" id="{9c4fa4a2-a39f-c7bc-8a27-4969f753e849}">
           <p14:sldIdLst>
             <p14:sldId id="265"/>
             <p14:sldId id="266"/>
             <p14:sldId id="267"/>
           </p14:sldIdLst>
         </p14:section>
-        <p14:section name="정리" id="{924a2fd2-2dfb-57d3-79e1-a2d5e7f98992}">
+        <p14:section name="정리" id="{d8d54ece-d5fb-52da-b647-a920f2f5ee67}">
           <p14:sldIdLst>
             <p14:sldId id="268"/>
           </p14:sldIdLst>
         </p14:section>
-        <p14:section name="보충" id="{fffdd052-5ff8-8b4f-a642-d8cf280f35d0}">
+        <p14:section name="보충" id="{b30c56a8-99a7-8def-fce8-77daa80cf873}">
           <p14:sldIdLst>
             <p14:sldId id="269"/>
           </p14:sldIdLst>
